--- a/instructor/slides/pptx/tutorials/14-dataweave-mapping/02-02-join-tables-on-the-payload.pptx
+++ b/instructor/slides/pptx/tutorials/14-dataweave-mapping/02-02-join-tables-on-the-payload.pptx
@@ -3667,8 +3667,8 @@
         </p:nvSpPr>
         <p:spPr>
           <a:xfrm>
-            <a:off x="640080" y="1920240"/>
-            <a:ext cx="10972800" cy="1463040"/>
+            <a:off x="640080" y="1828800"/>
+            <a:ext cx="6675120" cy="1645920"/>
           </a:xfrm>
           <a:prstGeom prst="rect">
             <a:avLst/>
@@ -3682,7 +3682,7 @@
           <a:lstStyle/>
           <a:p>
             <a:r>
-              <a:rPr sz="4400" b="1">
+              <a:rPr sz="4000" b="1">
                 <a:solidFill>
                   <a:srgbClr val="FFFFFF"/>
                 </a:solidFill>
@@ -3701,8 +3701,8 @@
         </p:nvSpPr>
         <p:spPr>
           <a:xfrm>
-            <a:off x="640080" y="3657600"/>
-            <a:ext cx="10789920" cy="1097280"/>
+            <a:off x="640080" y="3794760"/>
+            <a:ext cx="6675120" cy="1097280"/>
           </a:xfrm>
           <a:prstGeom prst="rect">
             <a:avLst/>
@@ -3716,7 +3716,7 @@
           <a:lstStyle/>
           <a:p>
             <a:r>
-              <a:rPr sz="2000" b="0">
+              <a:rPr sz="1800" b="0">
                 <a:solidFill>
                   <a:srgbClr val="B7CBDE"/>
                 </a:solidFill>
@@ -3727,6 +3727,30 @@
           </a:p>
         </p:txBody>
       </p:sp>
+      <p:pic>
+        <p:nvPicPr>
+          <p:cNvPr id="6" name="Picture 5" descr="dw-mapping.jpg"/>
+          <p:cNvPicPr>
+            <a:picLocks noChangeAspect="1"/>
+          </p:cNvPicPr>
+          <p:nvPr/>
+        </p:nvPicPr>
+        <p:blipFill>
+          <a:blip r:embed="rId2"/>
+          <a:stretch>
+            <a:fillRect/>
+          </a:stretch>
+        </p:blipFill>
+        <p:spPr>
+          <a:xfrm>
+            <a:off x="7452360" y="1325880"/>
+            <a:ext cx="4160520" cy="4160520"/>
+          </a:xfrm>
+          <a:prstGeom prst="rect">
+            <a:avLst/>
+          </a:prstGeom>
+        </p:spPr>
+      </p:pic>
     </p:spTree>
   </p:cSld>
   <p:clrMapOvr>
@@ -3830,8 +3854,8 @@
         </p:nvSpPr>
         <p:spPr>
           <a:xfrm>
-            <a:off x="640080" y="685800"/>
-            <a:ext cx="10972800" cy="1463040"/>
+            <a:off x="640080" y="658368"/>
+            <a:ext cx="7863840" cy="1645920"/>
           </a:xfrm>
           <a:prstGeom prst="rect">
             <a:avLst/>
@@ -3845,7 +3869,7 @@
           <a:lstStyle/>
           <a:p>
             <a:r>
-              <a:rPr sz="3200" b="1">
+              <a:rPr sz="3000" b="1">
                 <a:solidFill>
                   <a:srgbClr val="FFFFFF"/>
                 </a:solidFill>
@@ -3864,8 +3888,8 @@
         </p:nvSpPr>
         <p:spPr>
           <a:xfrm>
-            <a:off x="777240" y="2286000"/>
-            <a:ext cx="10607040" cy="4754880"/>
+            <a:off x="777240" y="2331720"/>
+            <a:ext cx="7498079" cy="4754880"/>
           </a:xfrm>
           <a:prstGeom prst="rect">
             <a:avLst/>
@@ -3884,7 +3908,7 @@
               </a:spcAft>
             </a:pPr>
             <a:r>
-              <a:rPr sz="2400" b="0">
+              <a:rPr sz="2200" b="0">
                 <a:solidFill>
                   <a:srgbClr val="FFFFFF"/>
                 </a:solidFill>
@@ -3895,6 +3919,30 @@
           </a:p>
         </p:txBody>
       </p:sp>
+      <p:pic>
+        <p:nvPicPr>
+          <p:cNvPr id="6" name="Picture 5" descr="dw-mapping.jpg"/>
+          <p:cNvPicPr>
+            <a:picLocks noChangeAspect="1"/>
+          </p:cNvPicPr>
+          <p:nvPr/>
+        </p:nvPicPr>
+        <p:blipFill>
+          <a:blip r:embed="rId2"/>
+          <a:stretch>
+            <a:fillRect/>
+          </a:stretch>
+        </p:blipFill>
+        <p:spPr>
+          <a:xfrm>
+            <a:off x="8732520" y="2057400"/>
+            <a:ext cx="2880360" cy="2880360"/>
+          </a:xfrm>
+          <a:prstGeom prst="rect">
+            <a:avLst/>
+          </a:prstGeom>
+        </p:spPr>
+      </p:pic>
     </p:spTree>
   </p:cSld>
   <p:clrMapOvr>
@@ -3998,8 +4046,8 @@
         </p:nvSpPr>
         <p:spPr>
           <a:xfrm>
-            <a:off x="640080" y="685800"/>
-            <a:ext cx="10972800" cy="1463040"/>
+            <a:off x="640080" y="658368"/>
+            <a:ext cx="7863840" cy="1645920"/>
           </a:xfrm>
           <a:prstGeom prst="rect">
             <a:avLst/>
@@ -4013,7 +4061,7 @@
           <a:lstStyle/>
           <a:p>
             <a:r>
-              <a:rPr sz="3200" b="1">
+              <a:rPr sz="3000" b="1">
                 <a:solidFill>
                   <a:srgbClr val="FFFFFF"/>
                 </a:solidFill>
@@ -4032,8 +4080,8 @@
         </p:nvSpPr>
         <p:spPr>
           <a:xfrm>
-            <a:off x="777240" y="2286000"/>
-            <a:ext cx="10607040" cy="4754880"/>
+            <a:off x="777240" y="2331720"/>
+            <a:ext cx="7498079" cy="4754880"/>
           </a:xfrm>
           <a:prstGeom prst="rect">
             <a:avLst/>
@@ -4052,7 +4100,7 @@
               </a:spcAft>
             </a:pPr>
             <a:r>
-              <a:rPr sz="2400" b="0">
+              <a:rPr sz="2200" b="0">
                 <a:solidFill>
                   <a:srgbClr val="FFFFFF"/>
                 </a:solidFill>
@@ -4063,6 +4111,30 @@
           </a:p>
         </p:txBody>
       </p:sp>
+      <p:pic>
+        <p:nvPicPr>
+          <p:cNvPr id="6" name="Picture 5" descr="dw-mapping.jpg"/>
+          <p:cNvPicPr>
+            <a:picLocks noChangeAspect="1"/>
+          </p:cNvPicPr>
+          <p:nvPr/>
+        </p:nvPicPr>
+        <p:blipFill>
+          <a:blip r:embed="rId2"/>
+          <a:stretch>
+            <a:fillRect/>
+          </a:stretch>
+        </p:blipFill>
+        <p:spPr>
+          <a:xfrm>
+            <a:off x="8732520" y="2057400"/>
+            <a:ext cx="2880360" cy="2880360"/>
+          </a:xfrm>
+          <a:prstGeom prst="rect">
+            <a:avLst/>
+          </a:prstGeom>
+        </p:spPr>
+      </p:pic>
     </p:spTree>
   </p:cSld>
   <p:clrMapOvr>
@@ -4166,8 +4238,8 @@
         </p:nvSpPr>
         <p:spPr>
           <a:xfrm>
-            <a:off x="640080" y="685800"/>
-            <a:ext cx="10972800" cy="1463040"/>
+            <a:off x="640080" y="658368"/>
+            <a:ext cx="10972800" cy="1645920"/>
           </a:xfrm>
           <a:prstGeom prst="rect">
             <a:avLst/>
@@ -4181,7 +4253,7 @@
           <a:lstStyle/>
           <a:p>
             <a:r>
-              <a:rPr sz="3200" b="1">
+              <a:rPr sz="3000" b="1">
                 <a:solidFill>
                   <a:srgbClr val="FFFFFF"/>
                 </a:solidFill>
@@ -4383,8 +4455,8 @@
         </p:nvSpPr>
         <p:spPr>
           <a:xfrm>
-            <a:off x="640080" y="685800"/>
-            <a:ext cx="10972800" cy="1463040"/>
+            <a:off x="640080" y="658368"/>
+            <a:ext cx="7863840" cy="1645920"/>
           </a:xfrm>
           <a:prstGeom prst="rect">
             <a:avLst/>
@@ -4398,7 +4470,7 @@
           <a:lstStyle/>
           <a:p>
             <a:r>
-              <a:rPr sz="3200" b="1">
+              <a:rPr sz="3000" b="1">
                 <a:solidFill>
                   <a:srgbClr val="FFFFFF"/>
                 </a:solidFill>
@@ -4417,8 +4489,8 @@
         </p:nvSpPr>
         <p:spPr>
           <a:xfrm>
-            <a:off x="777240" y="2286000"/>
-            <a:ext cx="10607040" cy="4754880"/>
+            <a:off x="777240" y="2331720"/>
+            <a:ext cx="7498079" cy="4754880"/>
           </a:xfrm>
           <a:prstGeom prst="rect">
             <a:avLst/>
@@ -4437,7 +4509,7 @@
               </a:spcAft>
             </a:pPr>
             <a:r>
-              <a:rPr sz="2400" b="0">
+              <a:rPr sz="2200" b="0">
                 <a:solidFill>
                   <a:srgbClr val="FFFFFF"/>
                 </a:solidFill>
@@ -4453,7 +4525,7 @@
               </a:spcAft>
             </a:pPr>
             <a:r>
-              <a:rPr sz="2400" b="0">
+              <a:rPr sz="2200" b="0">
                 <a:solidFill>
                   <a:srgbClr val="FFFFFF"/>
                 </a:solidFill>
@@ -4464,6 +4536,30 @@
           </a:p>
         </p:txBody>
       </p:sp>
+      <p:pic>
+        <p:nvPicPr>
+          <p:cNvPr id="6" name="Picture 5" descr="dw-mapping.jpg"/>
+          <p:cNvPicPr>
+            <a:picLocks noChangeAspect="1"/>
+          </p:cNvPicPr>
+          <p:nvPr/>
+        </p:nvPicPr>
+        <p:blipFill>
+          <a:blip r:embed="rId2"/>
+          <a:stretch>
+            <a:fillRect/>
+          </a:stretch>
+        </p:blipFill>
+        <p:spPr>
+          <a:xfrm>
+            <a:off x="8732520" y="2057400"/>
+            <a:ext cx="2880360" cy="2880360"/>
+          </a:xfrm>
+          <a:prstGeom prst="rect">
+            <a:avLst/>
+          </a:prstGeom>
+        </p:spPr>
+      </p:pic>
     </p:spTree>
   </p:cSld>
   <p:clrMapOvr>
